--- a/classes/parte-4-seguridad-de-aplicaciones-web/086-arquitectura-web-moderna-y-superficie-de-ataque/clase-086-presentacion.pptx
+++ b/classes/parte-4-seguridad-de-aplicaciones-web/086-arquitectura-web-moderna-y-superficie-de-ataque/clase-086-presentacion.pptx
@@ -3317,6 +3317,21 @@
               <a:t>•  Compara la superficie de ataque de una SPA vs. una app SSR clásica.</a:t>
             </a:r>
           </a:p>
+          <a:p>
+            <a:pPr>
+              <a:spcAft>
+                <a:spcPts val="600"/>
+              </a:spcAft>
+            </a:pPr>
+            <a:r>
+              <a:rPr sz="1500">
+                <a:solidFill>
+                  <a:srgbClr val="22282E"/>
+                </a:solidFill>
+              </a:rPr>
+              <a:t>•  Explica por qué un dominio correcto, un contrato verificado y una simulación sin alerta responden preguntas distintas y ninguno basta por sí solo para demostrar seguridad integral.</a:t>
+            </a:r>
+          </a:p>
         </p:txBody>
       </p:sp>
     </p:spTree>
@@ -3570,6 +3585,36 @@
               <a:t>•  Confundir HTTP/2 con HTTP/1 — Afecta a ataques de smuggling; identifica el protocolo</a:t>
             </a:r>
           </a:p>
+          <a:p>
+            <a:pPr>
+              <a:spcAft>
+                <a:spcPts val="600"/>
+              </a:spcAft>
+            </a:pPr>
+            <a:r>
+              <a:rPr sz="1500">
+                <a:solidFill>
+                  <a:srgbClr val="22282E"/>
+                </a:solidFill>
+              </a:rPr>
+              <a:t>•  Tratar «conectar wallet» como sinónimo de transferencia — Revisa la petición firmada y el cambio de estado; la conexión puede no producirlo</a:t>
+            </a:r>
+          </a:p>
+          <a:p>
+            <a:pPr>
+              <a:spcAft>
+                <a:spcPts val="600"/>
+              </a:spcAft>
+            </a:pPr>
+            <a:r>
+              <a:rPr sz="1500">
+                <a:solidFill>
+                  <a:srgbClr val="22282E"/>
+                </a:solidFill>
+              </a:rPr>
+              <a:t>•  Validar el sitio por el candado TLS — El certificado protege el canal al origen visitado; corrobora dominio y relación oficial</a:t>
+            </a:r>
+          </a:p>
         </p:txBody>
       </p:sp>
     </p:spTree>
@@ -3734,6 +3779,21 @@
               <a:t>•  No para empezar. Community cubre esta parte; Pro añade el scanner automático y algunas utilidades de Intruder.</a:t>
             </a:r>
           </a:p>
+          <a:p>
+            <a:pPr>
+              <a:spcAft>
+                <a:spcPts val="600"/>
+              </a:spcAft>
+            </a:pPr>
+            <a:r>
+              <a:rPr sz="1500">
+                <a:solidFill>
+                  <a:srgbClr val="22282E"/>
+                </a:solidFill>
+              </a:rPr>
+              <a:t>•  ❓ ¿Un contrato/programa malicioso es una vulnerabilidad web?</a:t>
+            </a:r>
+          </a:p>
         </p:txBody>
       </p:sp>
     </p:spTree>
@@ -3866,6 +3926,36 @@
                 </a:solidFill>
               </a:rPr>
               <a:t>•  OWASP Juice Shop: &lt;https://owasp.org/www-project-juice-shop/&gt;</a:t>
+            </a:r>
+          </a:p>
+          <a:p>
+            <a:pPr>
+              <a:spcAft>
+                <a:spcPts val="600"/>
+              </a:spcAft>
+            </a:pPr>
+            <a:r>
+              <a:rPr sz="1500">
+                <a:solidFill>
+                  <a:srgbClr val="22282E"/>
+                </a:solidFill>
+              </a:rPr>
+              <a:t>•  Ethereum Foundation — Trillion Dollar Security Project: frontends comprometidos, firma ciega y permisos persistentes como fronteras distintas. &lt;https://ethereum.org/reports/trillion-dollar-security/&gt;</a:t>
+            </a:r>
+          </a:p>
+          <a:p>
+            <a:pPr>
+              <a:spcAft>
+                <a:spcPts val="600"/>
+              </a:spcAft>
+            </a:pPr>
+            <a:r>
+              <a:rPr sz="1500">
+                <a:solidFill>
+                  <a:srgbClr val="22282E"/>
+                </a:solidFill>
+              </a:rPr>
+              <a:t>•  Solana — Core Concepts: relación entre transacciones, instrucciones, programas y cuentas en ese modelo de ejecución. &lt;https://solana.com/docs/core&gt;</a:t>
             </a:r>
           </a:p>
         </p:txBody>
@@ -4029,7 +4119,52 @@
                   <a:srgbClr val="22282E"/>
                 </a:solidFill>
               </a:rPr>
-              <a:t>•  Entender cómo está construida una aplicación web moderna —navegador, SPA, API, backend, base de datos, servicios cloud— y aprender a dibujar su superficie de ataque completa. Sin este mapa mental, el…</a:t>
+              <a:t>•  Entender cómo está construida una aplicación web moderna —navegador, SPA, API, backend, base de datos,</a:t>
+            </a:r>
+          </a:p>
+          <a:p>
+            <a:pPr>
+              <a:spcAft>
+                <a:spcPts val="600"/>
+              </a:spcAft>
+            </a:pPr>
+            <a:r>
+              <a:rPr sz="1500">
+                <a:solidFill>
+                  <a:srgbClr val="22282E"/>
+                </a:solidFill>
+              </a:rPr>
+              <a:t>•  servicios cloud e integraciones externas— y aprender a dibujar su superficie de ataque completa.</a:t>
+            </a:r>
+          </a:p>
+          <a:p>
+            <a:pPr>
+              <a:spcAft>
+                <a:spcPts val="600"/>
+              </a:spcAft>
+            </a:pPr>
+            <a:r>
+              <a:rPr sz="1500">
+                <a:solidFill>
+                  <a:srgbClr val="22282E"/>
+                </a:solidFill>
+              </a:rPr>
+              <a:t>•  Sin este mapa mental, el resto de la parte se convierte en probar payloads a ciegas; con él, cada</a:t>
+            </a:r>
+          </a:p>
+          <a:p>
+            <a:pPr>
+              <a:spcAft>
+                <a:spcPts val="600"/>
+              </a:spcAft>
+            </a:pPr>
+            <a:r>
+              <a:rPr sz="1500">
+                <a:solidFill>
+                  <a:srgbClr val="22282E"/>
+                </a:solidFill>
+              </a:rPr>
+              <a:t>•  prueba tiene un porqué y cada frontera conserva su propia autoridad.</a:t>
             </a:r>
           </a:p>
         </p:txBody>
@@ -4196,6 +4331,21 @@
               <a:t>•  Clasificar activos por sensibilidad para priorizar el testing.</a:t>
             </a:r>
           </a:p>
+          <a:p>
+            <a:pPr>
+              <a:spcAft>
+                <a:spcPts val="600"/>
+              </a:spcAft>
+            </a:pPr>
+            <a:r>
+              <a:rPr sz="1500">
+                <a:solidFill>
+                  <a:srgbClr val="22282E"/>
+                </a:solidFill>
+              </a:rPr>
+              <a:t>•  Separar la identidad y seguridad de un frontend de los efectos que solicita a un proveedor externo, como una wallet.</a:t>
+            </a:r>
+          </a:p>
         </p:txBody>
       </p:sp>
     </p:spTree>
@@ -4716,6 +4866,21 @@
                 </a:solidFill>
               </a:rPr>
               <a:t>•  Metadata endpoint (cloud): servicio interno (169.254.169.254) que entrega credenciales temporales. Característica: alcanzable vía SSRF si no se protege.</a:t>
+            </a:r>
+          </a:p>
+          <a:p>
+            <a:pPr>
+              <a:spcAft>
+                <a:spcPts val="600"/>
+              </a:spcAft>
+            </a:pPr>
+            <a:r>
+              <a:rPr sz="1500">
+                <a:solidFill>
+                  <a:srgbClr val="22282E"/>
+                </a:solidFill>
+              </a:rPr>
+              <a:t>•  Origen web: combinación de esquema, host y puerto que delimita confianza en el navegador. Característica: un lookalike con TLS sigue siendo otro origen.</a:t>
             </a:r>
           </a:p>
         </p:txBody>
